--- a/03-Run Interactive queries using Azure Synapse Serverless.pptx
+++ b/03-Run Interactive queries using Azure Synapse Serverless.pptx
@@ -609,7 +609,7 @@
           <a:p>
             <a:fld id="{2B56BDA5-FBCC-43E1-957B-02AF36889AD5}" type="datetimeFigureOut">
               <a:rPr lang="en-US" smtClean="0"/>
-              <a:t>9/7/2024</a:t>
+              <a:t>9/8/2024</a:t>
             </a:fld>
             <a:endParaRPr lang="en-US" dirty="0"/>
           </a:p>
@@ -786,7 +786,7 @@
           <a:p>
             <a:fld id="{8F44CDF0-0D54-4AFE-B409-D6358A9BB9A1}" type="datetimeFigureOut">
               <a:rPr lang="en-US" smtClean="0"/>
-              <a:t>9/7/2024</a:t>
+              <a:t>9/8/2024</a:t>
             </a:fld>
             <a:endParaRPr lang="en-US" dirty="0"/>
           </a:p>
@@ -26696,7 +26696,11 @@
           <a:lstStyle/>
           <a:p>
             <a:r>
-              <a:rPr lang="en-US" dirty="0"/>
+              <a:rPr lang="en-US" dirty="0">
+                <a:solidFill>
+                  <a:schemeClr val="bg1"/>
+                </a:solidFill>
+              </a:rPr>
               <a:t>Parquet</a:t>
             </a:r>
           </a:p>
